--- a/TRB.pptx
+++ b/TRB.pptx
@@ -8185,7 +8185,7 @@
                   <a:latin typeface="Times New Roman" panose="02020603050405020304" pitchFamily="18" charset="0"/>
                   <a:cs typeface="Times New Roman" panose="02020603050405020304" pitchFamily="18" charset="0"/>
                 </a:rPr>
-                <a:t>Own ship state.</a:t>
+                <a:t>Own vessel state.</a:t>
               </a:r>
             </a:p>
             <a:p>
@@ -8198,7 +8198,7 @@
                   <a:latin typeface="Times New Roman" panose="02020603050405020304" pitchFamily="18" charset="0"/>
                   <a:cs typeface="Times New Roman" panose="02020603050405020304" pitchFamily="18" charset="0"/>
                 </a:rPr>
-                <a:t>Target ship state.</a:t>
+                <a:t>Target vessel state.</a:t>
               </a:r>
             </a:p>
             <a:p>
@@ -8340,7 +8340,7 @@
             <a:p>
               <a:r>
                 <a:rPr lang="en-US" dirty="0"/>
-                <a:t>Emergency state</a:t>
+                <a:t>Emergency situation</a:t>
               </a:r>
             </a:p>
           </p:txBody>
@@ -8453,7 +8453,7 @@
                   <a:latin typeface="Consolas" panose="020B0609020204030204" pitchFamily="49" charset="0"/>
                   <a:cs typeface="Consolas" panose="020B0609020204030204" pitchFamily="49" charset="0"/>
                 </a:rPr>
-                <a:t>Continues-PPO</a:t>
+                <a:t>Continuous PPO</a:t>
               </a:r>
               <a:endParaRPr lang="en-US" dirty="0">
                 <a:solidFill>
@@ -9209,7 +9209,7 @@
             <a:p>
               <a:r>
                 <a:rPr lang="en-US" dirty="0"/>
-                <a:t>Normal</a:t>
+                <a:t>Non-emergency</a:t>
               </a:r>
               <a:r>
                 <a:rPr lang="zh-CN" altLang="en-US" dirty="0"/>
@@ -9217,7 +9217,7 @@
               </a:r>
               <a:r>
                 <a:rPr lang="en-US" altLang="zh-CN" dirty="0"/>
-                <a:t>state</a:t>
+                <a:t/>
               </a:r>
               <a:endParaRPr lang="en-US" dirty="0"/>
             </a:p>
@@ -9279,7 +9279,7 @@
                 <a:p>
                   <a:r>
                     <a:rPr lang="en-US" dirty="0"/>
-                    <a:t>Safe Action Set</a:t>
+                    <a:t>Safe Control Set</a:t>
                   </a:r>
                   <a:r>
                     <a:rPr lang="zh-CN" altLang="en-US" dirty="0"/>
@@ -11182,7 +11182,7 @@
                   <a:latin typeface="Consolas" panose="020B0609020204030204" pitchFamily="49" charset="0"/>
                   <a:cs typeface="Consolas" panose="020B0609020204030204" pitchFamily="49" charset="0"/>
                 </a:rPr>
-                <a:t>Actor–Critic Update</a:t>
+                <a:t>Actor-Critic Update</a:t>
               </a:r>
             </a:p>
           </p:txBody>
@@ -11469,7 +11469,7 @@
                   <a:latin typeface="Times New Roman" panose="02020603050405020304" pitchFamily="18" charset="0"/>
                   <a:cs typeface="Times New Roman" panose="02020603050405020304" pitchFamily="18" charset="0"/>
                 </a:rPr>
-                <a:t>Ship</a:t>
+                <a:t>Vessel</a:t>
               </a:r>
               <a:r>
                 <a:rPr lang="zh-CN" altLang="en-US" sz="1600" dirty="0">
